--- a/dist/sunum/surtunme-kuvveti.pptx
+++ b/dist/sunum/surtunme-kuvveti.pptx
@@ -5068,7 +5068,7 @@
       </p:grpSpPr>
       <p:pic>
         <p:nvPicPr>
-          <p:cNvPr id="2" name="Image 0" descr="/tmp/claude-1000/-opt-dersler/8a8328c3-841c-44fa-b76f-82572d338d3d/scratchpad/d4/sek/surtunme-kuvveti-kapak.jpg">    </p:cNvPr>
+          <p:cNvPr id="2" name="Image 0" descr="/tmp/claude-1000/-opt-dersler/8a8328c3-841c-44fa-b76f-82572d338d3d/scratchpad/d5/sek/surtunme-kuvveti-kapak.jpg">    </p:cNvPr>
           <p:cNvPicPr>
             <a:picLocks noChangeAspect="1"/>
           </p:cNvPicPr>
@@ -5721,69 +5721,6 @@
         </p:nvSpPr>
         <p:spPr>
           <a:xfrm>
-            <a:off x="9448495" y="6309360"/>
-            <a:ext cx="2103120" cy="274320"/>
-          </a:xfrm>
-          <a:prstGeom prst="roundRect">
-            <a:avLst>
-              <a:gd name="adj" fmla="val 50000"/>
-            </a:avLst>
-          </a:prstGeom>
-          <a:solidFill>
-            <a:srgbClr val="0E1426">
-              <a:alpha val="65000"/>
-            </a:srgbClr>
-          </a:solidFill>
-          <a:ln/>
-        </p:spPr>
-      </p:sp>
-      <p:sp>
-        <p:nvSpPr>
-          <p:cNvPr id="22" name="Text 19"/>
-          <p:cNvSpPr txBox="1"/>
-          <p:nvPr/>
-        </p:nvSpPr>
-        <p:spPr>
-          <a:xfrm>
-            <a:off x="9448495" y="6309360"/>
-            <a:ext cx="2103120" cy="274320"/>
-          </a:xfrm>
-          <a:prstGeom prst="rect">
-            <a:avLst/>
-          </a:prstGeom>
-          <a:noFill/>
-          <a:ln/>
-        </p:spPr>
-        <p:txBody>
-          <a:bodyPr wrap="square" lIns="0" tIns="0" rIns="0" bIns="0" rtlCol="0" anchor="ctr"/>
-          <a:lstStyle/>
-          <a:p>
-            <a:pPr algn="ctr" indent="0" marL="0">
-              <a:buNone/>
-            </a:pPr>
-            <a:r>
-              <a:rPr lang="en-US" sz="900" dirty="0">
-                <a:solidFill>
-                  <a:srgbClr val="E4E9F5"/>
-                </a:solidFill>
-                <a:latin typeface="Calibri" pitchFamily="34" charset="0"/>
-                <a:ea typeface="Calibri" pitchFamily="34" charset="-122"/>
-                <a:cs typeface="Calibri" pitchFamily="34" charset="-120"/>
-              </a:rPr>
-              <a:t>Görsel: yapay zekâ ile üretildi</a:t>
-            </a:r>
-            <a:endParaRPr lang="en-US" sz="900" dirty="0"/>
-          </a:p>
-        </p:txBody>
-      </p:sp>
-      <p:sp>
-        <p:nvSpPr>
-          <p:cNvPr id="23" name="Shape 20"/>
-          <p:cNvSpPr/>
-          <p:nvPr/>
-        </p:nvSpPr>
-        <p:spPr>
-          <a:xfrm>
             <a:off x="640080" y="6382512"/>
             <a:ext cx="128016" cy="128016"/>
           </a:xfrm>
@@ -5800,7 +5737,7 @@
       </p:sp>
       <p:sp>
         <p:nvSpPr>
-          <p:cNvPr id="24" name="Text 21"/>
+          <p:cNvPr id="22" name="Text 19"/>
           <p:cNvSpPr txBox="1"/>
           <p:nvPr/>
         </p:nvSpPr>
@@ -9099,7 +9036,7 @@
       </p:sp>
       <p:pic>
         <p:nvPicPr>
-          <p:cNvPr id="19" name="Image 0" descr="/tmp/claude-1000/-opt-dersler/8a8328c3-841c-44fa-b76f-82572d338d3d/scratchpad/d4/sek/surtunme-kuvveti-03.png">    </p:cNvPr>
+          <p:cNvPr id="19" name="Image 0" descr="/tmp/claude-1000/-opt-dersler/8a8328c3-841c-44fa-b76f-82572d338d3d/scratchpad/d5/sek/surtunme-kuvveti-03.png">    </p:cNvPr>
           <p:cNvPicPr>
             <a:picLocks noChangeAspect="1"/>
           </p:cNvPicPr>
@@ -12693,7 +12630,7 @@
       </p:sp>
       <p:pic>
         <p:nvPicPr>
-          <p:cNvPr id="13" name="Image 0" descr="/tmp/claude-1000/-opt-dersler/8a8328c3-841c-44fa-b76f-82572d338d3d/scratchpad/d4/sek/surtunme-kuvveti-04.png">    </p:cNvPr>
+          <p:cNvPr id="13" name="Image 0" descr="/tmp/claude-1000/-opt-dersler/8a8328c3-841c-44fa-b76f-82572d338d3d/scratchpad/d5/sek/surtunme-kuvveti-04.png">    </p:cNvPr>
           <p:cNvPicPr>
             <a:picLocks noChangeAspect="1"/>
           </p:cNvPicPr>
@@ -16889,7 +16826,7 @@
       </p:sp>
       <p:pic>
         <p:nvPicPr>
-          <p:cNvPr id="18" name="Image 0" descr="/tmp/claude-1000/-opt-dersler/8a8328c3-841c-44fa-b76f-82572d338d3d/scratchpad/d4/sek/surtunme-kuvveti-05.png">    </p:cNvPr>
+          <p:cNvPr id="18" name="Image 0" descr="/tmp/claude-1000/-opt-dersler/8a8328c3-841c-44fa-b76f-82572d338d3d/scratchpad/d5/sek/surtunme-kuvveti-05.png">    </p:cNvPr>
           <p:cNvPicPr>
             <a:picLocks noChangeAspect="1"/>
           </p:cNvPicPr>
@@ -20103,7 +20040,7 @@
       </p:sp>
       <p:pic>
         <p:nvPicPr>
-          <p:cNvPr id="11" name="Image 0" descr="/tmp/claude-1000/-opt-dersler/8a8328c3-841c-44fa-b76f-82572d338d3d/scratchpad/d4/sek/surtunme-kuvveti-06.png">    </p:cNvPr>
+          <p:cNvPr id="11" name="Image 0" descr="/tmp/claude-1000/-opt-dersler/8a8328c3-841c-44fa-b76f-82572d338d3d/scratchpad/d5/sek/surtunme-kuvveti-06.png">    </p:cNvPr>
           <p:cNvPicPr>
             <a:picLocks noChangeAspect="1"/>
           </p:cNvPicPr>
@@ -22937,7 +22874,7 @@
       </p:sp>
       <p:pic>
         <p:nvPicPr>
-          <p:cNvPr id="10" name="Image 0" descr="/tmp/claude-1000/-opt-dersler/8a8328c3-841c-44fa-b76f-82572d338d3d/scratchpad/d4/sek/surtunme-kuvveti-uygulama-kart.jpg">    </p:cNvPr>
+          <p:cNvPr id="10" name="Image 0" descr="/tmp/claude-1000/-opt-dersler/8a8328c3-841c-44fa-b76f-82572d338d3d/scratchpad/d5/sek/surtunme-kuvveti-uygulama-kart.jpg">    </p:cNvPr>
           <p:cNvPicPr>
             <a:picLocks noChangeAspect="1"/>
           </p:cNvPicPr>
@@ -22961,70 +22898,7 @@
       </p:pic>
       <p:sp>
         <p:nvSpPr>
-          <p:cNvPr id="11" name="Shape 8"/>
-          <p:cNvSpPr/>
-          <p:nvPr/>
-        </p:nvSpPr>
-        <p:spPr>
-          <a:xfrm>
-            <a:off x="9704527" y="4198925"/>
-            <a:ext cx="1755648" cy="246888"/>
-          </a:xfrm>
-          <a:prstGeom prst="roundRect">
-            <a:avLst>
-              <a:gd name="adj" fmla="val 48148"/>
-            </a:avLst>
-          </a:prstGeom>
-          <a:solidFill>
-            <a:srgbClr val="0E1426">
-              <a:alpha val="60000"/>
-            </a:srgbClr>
-          </a:solidFill>
-          <a:ln/>
-        </p:spPr>
-      </p:sp>
-      <p:sp>
-        <p:nvSpPr>
-          <p:cNvPr id="12" name="Text 9"/>
-          <p:cNvSpPr txBox="1"/>
-          <p:nvPr/>
-        </p:nvSpPr>
-        <p:spPr>
-          <a:xfrm>
-            <a:off x="9704527" y="4198925"/>
-            <a:ext cx="1755648" cy="246888"/>
-          </a:xfrm>
-          <a:prstGeom prst="rect">
-            <a:avLst/>
-          </a:prstGeom>
-          <a:noFill/>
-          <a:ln/>
-        </p:spPr>
-        <p:txBody>
-          <a:bodyPr wrap="square" lIns="0" tIns="0" rIns="0" bIns="0" rtlCol="0" anchor="ctr"/>
-          <a:lstStyle/>
-          <a:p>
-            <a:pPr algn="ctr" indent="0" marL="0">
-              <a:buNone/>
-            </a:pPr>
-            <a:r>
-              <a:rPr lang="en-US" sz="850" dirty="0">
-                <a:solidFill>
-                  <a:srgbClr val="FFFFFF"/>
-                </a:solidFill>
-                <a:latin typeface="Calibri" pitchFamily="34" charset="0"/>
-                <a:ea typeface="Calibri" pitchFamily="34" charset="-122"/>
-                <a:cs typeface="Calibri" pitchFamily="34" charset="-120"/>
-              </a:rPr>
-              <a:t>Yapay zekâ ile üretildi</a:t>
-            </a:r>
-            <a:endParaRPr lang="en-US" sz="850" dirty="0"/>
-          </a:p>
-        </p:txBody>
-      </p:sp>
-      <p:sp>
-        <p:nvSpPr>
-          <p:cNvPr id="13" name="Text 10"/>
+          <p:cNvPr id="11" name="Text 8"/>
           <p:cNvSpPr txBox="1"/>
           <p:nvPr/>
         </p:nvSpPr>
@@ -23083,7 +22957,7 @@
       </p:sp>
       <p:sp>
         <p:nvSpPr>
-          <p:cNvPr id="14" name="Shape 11"/>
+          <p:cNvPr id="12" name="Shape 9"/>
           <p:cNvSpPr/>
           <p:nvPr/>
         </p:nvSpPr>
@@ -23105,7 +22979,7 @@
       </p:sp>
       <p:sp>
         <p:nvSpPr>
-          <p:cNvPr id="15" name="Text 12"/>
+          <p:cNvPr id="13" name="Text 10"/>
           <p:cNvSpPr txBox="1"/>
           <p:nvPr/>
         </p:nvSpPr>
@@ -23144,7 +23018,7 @@
       </p:sp>
       <p:sp>
         <p:nvSpPr>
-          <p:cNvPr id="16" name="Text 13"/>
+          <p:cNvPr id="14" name="Text 11"/>
           <p:cNvSpPr txBox="1"/>
           <p:nvPr/>
         </p:nvSpPr>
@@ -37455,7 +37329,7 @@
       </p:sp>
       <p:pic>
         <p:nvPicPr>
-          <p:cNvPr id="10" name="Image 0" descr="/tmp/claude-1000/-opt-dersler/8a8328c3-841c-44fa-b76f-82572d338d3d/scratchpad/d4/sek/surtunme-kuvveti-gunluk-kart.jpg">    </p:cNvPr>
+          <p:cNvPr id="10" name="Image 0" descr="/tmp/claude-1000/-opt-dersler/8a8328c3-841c-44fa-b76f-82572d338d3d/scratchpad/d5/sek/surtunme-kuvveti-gunluk-kart.jpg">    </p:cNvPr>
           <p:cNvPicPr>
             <a:picLocks noChangeAspect="1"/>
           </p:cNvPicPr>
@@ -37479,70 +37353,7 @@
       </p:pic>
       <p:sp>
         <p:nvSpPr>
-          <p:cNvPr id="11" name="Shape 8"/>
-          <p:cNvSpPr/>
-          <p:nvPr/>
-        </p:nvSpPr>
-        <p:spPr>
-          <a:xfrm>
-            <a:off x="9704527" y="4198925"/>
-            <a:ext cx="1755648" cy="246888"/>
-          </a:xfrm>
-          <a:prstGeom prst="roundRect">
-            <a:avLst>
-              <a:gd name="adj" fmla="val 48148"/>
-            </a:avLst>
-          </a:prstGeom>
-          <a:solidFill>
-            <a:srgbClr val="0E1426">
-              <a:alpha val="60000"/>
-            </a:srgbClr>
-          </a:solidFill>
-          <a:ln/>
-        </p:spPr>
-      </p:sp>
-      <p:sp>
-        <p:nvSpPr>
-          <p:cNvPr id="12" name="Text 9"/>
-          <p:cNvSpPr txBox="1"/>
-          <p:nvPr/>
-        </p:nvSpPr>
-        <p:spPr>
-          <a:xfrm>
-            <a:off x="9704527" y="4198925"/>
-            <a:ext cx="1755648" cy="246888"/>
-          </a:xfrm>
-          <a:prstGeom prst="rect">
-            <a:avLst/>
-          </a:prstGeom>
-          <a:noFill/>
-          <a:ln/>
-        </p:spPr>
-        <p:txBody>
-          <a:bodyPr wrap="square" lIns="0" tIns="0" rIns="0" bIns="0" rtlCol="0" anchor="ctr"/>
-          <a:lstStyle/>
-          <a:p>
-            <a:pPr algn="ctr" indent="0" marL="0">
-              <a:buNone/>
-            </a:pPr>
-            <a:r>
-              <a:rPr lang="en-US" sz="850" dirty="0">
-                <a:solidFill>
-                  <a:srgbClr val="FFFFFF"/>
-                </a:solidFill>
-                <a:latin typeface="Calibri" pitchFamily="34" charset="0"/>
-                <a:ea typeface="Calibri" pitchFamily="34" charset="-122"/>
-                <a:cs typeface="Calibri" pitchFamily="34" charset="-120"/>
-              </a:rPr>
-              <a:t>Yapay zekâ ile üretildi</a:t>
-            </a:r>
-            <a:endParaRPr lang="en-US" sz="850" dirty="0"/>
-          </a:p>
-        </p:txBody>
-      </p:sp>
-      <p:sp>
-        <p:nvSpPr>
-          <p:cNvPr id="13" name="Text 10"/>
+          <p:cNvPr id="11" name="Text 8"/>
           <p:cNvSpPr txBox="1"/>
           <p:nvPr/>
         </p:nvSpPr>
@@ -37601,7 +37412,7 @@
       </p:sp>
       <p:sp>
         <p:nvSpPr>
-          <p:cNvPr id="14" name="Shape 11"/>
+          <p:cNvPr id="12" name="Shape 9"/>
           <p:cNvSpPr/>
           <p:nvPr/>
         </p:nvSpPr>
@@ -37623,7 +37434,7 @@
       </p:sp>
       <p:sp>
         <p:nvSpPr>
-          <p:cNvPr id="15" name="Text 12"/>
+          <p:cNvPr id="13" name="Text 10"/>
           <p:cNvSpPr txBox="1"/>
           <p:nvPr/>
         </p:nvSpPr>
@@ -37662,7 +37473,7 @@
       </p:sp>
       <p:sp>
         <p:nvSpPr>
-          <p:cNvPr id="16" name="Text 13"/>
+          <p:cNvPr id="14" name="Text 11"/>
           <p:cNvSpPr txBox="1"/>
           <p:nvPr/>
         </p:nvSpPr>
@@ -47570,7 +47381,7 @@
       </p:sp>
       <p:pic>
         <p:nvPicPr>
-          <p:cNvPr id="14" name="Image 0" descr="/tmp/claude-1000/-opt-dersler/8a8328c3-841c-44fa-b76f-82572d338d3d/scratchpad/d4/sek/surtunme-kuvveti-01.png">    </p:cNvPr>
+          <p:cNvPr id="14" name="Image 0" descr="/tmp/claude-1000/-opt-dersler/8a8328c3-841c-44fa-b76f-82572d338d3d/scratchpad/d5/sek/surtunme-kuvveti-01.png">    </p:cNvPr>
           <p:cNvPicPr>
             <a:picLocks noChangeAspect="1"/>
           </p:cNvPicPr>
@@ -49409,7 +49220,7 @@
       </p:sp>
       <p:pic>
         <p:nvPicPr>
-          <p:cNvPr id="11" name="Image 0" descr="/tmp/claude-1000/-opt-dersler/8a8328c3-841c-44fa-b76f-82572d338d3d/scratchpad/d4/sek/surtunme-kuvveti-02.png">    </p:cNvPr>
+          <p:cNvPr id="11" name="Image 0" descr="/tmp/claude-1000/-opt-dersler/8a8328c3-841c-44fa-b76f-82572d338d3d/scratchpad/d5/sek/surtunme-kuvveti-02.png">    </p:cNvPr>
           <p:cNvPicPr>
             <a:picLocks noChangeAspect="1"/>
           </p:cNvPicPr>
